--- a/presentations/b11-zero-trust/B11_Zero_Trust_Narrated.pptx
+++ b/presentations/b11-zero-trust/B11_Zero_Trust_Narrated.pptx
@@ -187,7 +187,7 @@
     </p:spTree>
     <p:extLst>
       <p:ext uri="{BB962C8B-B14F-4D97-AF65-F5344CB8AC3E}">
-        <p14:creationId xmlns:p14="http://schemas.microsoft.com/office/powerpoint/2010/main" val="3669890036"/>
+        <p14:creationId xmlns:p14="http://schemas.microsoft.com/office/powerpoint/2010/main" val="2150342761"/>
       </p:ext>
     </p:extLst>
   </p:cSld>
@@ -2521,7 +2521,7 @@
             <a:hlinkClick r:id="" action="ppaction://media"/>
             <a:extLst>
               <a:ext uri="{FF2B5EF4-FFF2-40B4-BE49-F238E27FC236}">
-                <a16:creationId xmlns:a16="http://schemas.microsoft.com/office/drawing/2014/main" id="{87907A82-081E-C11C-653B-BF5CF908E254}"/>
+                <a16:creationId xmlns:a16="http://schemas.microsoft.com/office/drawing/2014/main" id="{0DF75DCE-EBA9-FE75-40C6-372D8DFE29EC}"/>
               </a:ext>
             </a:extLst>
           </p:cNvPr>
@@ -2537,7 +2537,7 @@
                     <p:ext uri="{3AFAAA56-56D3-431D-BCD4-E75A35582382}">
                       <p173:tracksInfo xmlns:p173="http://schemas.microsoft.com/office/powerpoint/2017/3/main" displayLoc="slide">
                         <p173:trackLst>
-                          <p173:track id="{852A6BAF-FB94-4843-8063-91737B0C945B}" label="English (captions)" lang="en-US" r:embed="rId6"/>
+                          <p173:track id="{E0A6307D-D7C2-4F19-93CC-C379F06C7ADE}" label="English (captions)" lang="en-US" r:embed="rId6"/>
                         </p173:trackLst>
                       </p173:tracksInfo>
                     </p:ext>
@@ -2555,7 +2555,7 @@
         </p:blipFill>
         <p:spPr>
           <a:xfrm>
-            <a:off x="127000" y="6350000"/>
+            <a:off x="12446000" y="127000"/>
             <a:ext cx="304800" cy="304800"/>
           </a:xfrm>
           <a:prstGeom prst="rect">
@@ -4118,7 +4118,7 @@
             <a:hlinkClick r:id="" action="ppaction://media"/>
             <a:extLst>
               <a:ext uri="{FF2B5EF4-FFF2-40B4-BE49-F238E27FC236}">
-                <a16:creationId xmlns:a16="http://schemas.microsoft.com/office/drawing/2014/main" id="{940470F4-DDF4-6952-93FB-445B070BE414}"/>
+                <a16:creationId xmlns:a16="http://schemas.microsoft.com/office/drawing/2014/main" id="{4154C376-5E90-A964-8CDA-60E3EE1C1B75}"/>
               </a:ext>
             </a:extLst>
           </p:cNvPr>
@@ -4134,7 +4134,7 @@
                     <p:ext uri="{3AFAAA56-56D3-431D-BCD4-E75A35582382}">
                       <p173:tracksInfo xmlns:p173="http://schemas.microsoft.com/office/powerpoint/2017/3/main" displayLoc="slide">
                         <p173:trackLst>
-                          <p173:track id="{54241A35-B6FB-4221-935F-0C19D9ACB508}" label="English (captions)" lang="en-US" r:embed="rId9"/>
+                          <p173:track id="{4B992B9C-7DB9-44A8-AF2C-37925282CF74}" label="English (captions)" lang="en-US" r:embed="rId9"/>
                         </p173:trackLst>
                       </p173:tracksInfo>
                     </p:ext>
@@ -4152,7 +4152,7 @@
         </p:blipFill>
         <p:spPr>
           <a:xfrm>
-            <a:off x="127000" y="6350000"/>
+            <a:off x="12446000" y="127000"/>
             <a:ext cx="304800" cy="304800"/>
           </a:xfrm>
           <a:prstGeom prst="rect">
@@ -5309,7 +5309,7 @@
             <a:hlinkClick r:id="" action="ppaction://media"/>
             <a:extLst>
               <a:ext uri="{FF2B5EF4-FFF2-40B4-BE49-F238E27FC236}">
-                <a16:creationId xmlns:a16="http://schemas.microsoft.com/office/drawing/2014/main" id="{6765B678-6CB1-6006-7BE3-CF58DB6C24FA}"/>
+                <a16:creationId xmlns:a16="http://schemas.microsoft.com/office/drawing/2014/main" id="{E3778244-E34E-163D-1775-9105869F95DE}"/>
               </a:ext>
             </a:extLst>
           </p:cNvPr>
@@ -5325,7 +5325,7 @@
                     <p:ext uri="{3AFAAA56-56D3-431D-BCD4-E75A35582382}">
                       <p173:tracksInfo xmlns:p173="http://schemas.microsoft.com/office/powerpoint/2017/3/main" displayLoc="slide">
                         <p173:trackLst>
-                          <p173:track id="{B9CA780D-FAEC-41A2-A5E0-8EC6055482B9}" label="English (captions)" lang="en-US" r:embed="rId8"/>
+                          <p173:track id="{B3FA630E-2F8E-42C1-AF54-5CF9E9DE8F6C}" label="English (captions)" lang="en-US" r:embed="rId8"/>
                         </p173:trackLst>
                       </p173:tracksInfo>
                     </p:ext>
@@ -5343,7 +5343,7 @@
         </p:blipFill>
         <p:spPr>
           <a:xfrm>
-            <a:off x="127000" y="6350000"/>
+            <a:off x="12446000" y="127000"/>
             <a:ext cx="304800" cy="304800"/>
           </a:xfrm>
           <a:prstGeom prst="rect">
@@ -6692,7 +6692,7 @@
             <a:hlinkClick r:id="" action="ppaction://media"/>
             <a:extLst>
               <a:ext uri="{FF2B5EF4-FFF2-40B4-BE49-F238E27FC236}">
-                <a16:creationId xmlns:a16="http://schemas.microsoft.com/office/drawing/2014/main" id="{81F1A52E-95FA-E143-5D1B-1E34AAC7AB46}"/>
+                <a16:creationId xmlns:a16="http://schemas.microsoft.com/office/drawing/2014/main" id="{528D2111-1981-76E4-01B0-E7B144F4A2E8}"/>
               </a:ext>
             </a:extLst>
           </p:cNvPr>
@@ -6708,7 +6708,7 @@
                     <p:ext uri="{3AFAAA56-56D3-431D-BCD4-E75A35582382}">
                       <p173:tracksInfo xmlns:p173="http://schemas.microsoft.com/office/powerpoint/2017/3/main" displayLoc="slide">
                         <p173:trackLst>
-                          <p173:track id="{5C7828DA-FD74-4BAC-947C-374A51005D87}" label="English (captions)" lang="en-US" r:embed="rId9"/>
+                          <p173:track id="{8F92C556-4421-4129-8677-8469A13F09DA}" label="English (captions)" lang="en-US" r:embed="rId9"/>
                         </p173:trackLst>
                       </p173:tracksInfo>
                     </p:ext>
@@ -6726,7 +6726,7 @@
         </p:blipFill>
         <p:spPr>
           <a:xfrm>
-            <a:off x="127000" y="6350000"/>
+            <a:off x="12446000" y="127000"/>
             <a:ext cx="304800" cy="304800"/>
           </a:xfrm>
           <a:prstGeom prst="rect">
@@ -8728,7 +8728,7 @@
             <a:hlinkClick r:id="" action="ppaction://media"/>
             <a:extLst>
               <a:ext uri="{FF2B5EF4-FFF2-40B4-BE49-F238E27FC236}">
-                <a16:creationId xmlns:a16="http://schemas.microsoft.com/office/drawing/2014/main" id="{55428CBC-47A7-8484-245B-9F6FD1004B16}"/>
+                <a16:creationId xmlns:a16="http://schemas.microsoft.com/office/drawing/2014/main" id="{FF97614C-5FE2-9E2F-1042-9D59EEBD29B7}"/>
               </a:ext>
             </a:extLst>
           </p:cNvPr>
@@ -8744,7 +8744,7 @@
                     <p:ext uri="{3AFAAA56-56D3-431D-BCD4-E75A35582382}">
                       <p173:tracksInfo xmlns:p173="http://schemas.microsoft.com/office/powerpoint/2017/3/main" displayLoc="slide">
                         <p173:trackLst>
-                          <p173:track id="{2B1C9C92-E7EF-474A-B8E5-5BB658B75D20}" label="English (captions)" lang="en-US" r:embed="rId8"/>
+                          <p173:track id="{E4359405-A229-4FED-AA34-49AB3FAA9C9B}" label="English (captions)" lang="en-US" r:embed="rId8"/>
                         </p173:trackLst>
                       </p173:tracksInfo>
                     </p:ext>
@@ -8762,7 +8762,7 @@
         </p:blipFill>
         <p:spPr>
           <a:xfrm>
-            <a:off x="127000" y="6350000"/>
+            <a:off x="12446000" y="127000"/>
             <a:ext cx="304800" cy="304800"/>
           </a:xfrm>
           <a:prstGeom prst="rect">
@@ -9831,7 +9831,7 @@
             <a:hlinkClick r:id="" action="ppaction://media"/>
             <a:extLst>
               <a:ext uri="{FF2B5EF4-FFF2-40B4-BE49-F238E27FC236}">
-                <a16:creationId xmlns:a16="http://schemas.microsoft.com/office/drawing/2014/main" id="{9CB05029-B3D6-F2F4-9D12-9B3A9E4CEBFF}"/>
+                <a16:creationId xmlns:a16="http://schemas.microsoft.com/office/drawing/2014/main" id="{B0F6D4AE-4DD4-BBCE-5A9C-76613638A030}"/>
               </a:ext>
             </a:extLst>
           </p:cNvPr>
@@ -9847,7 +9847,7 @@
                     <p:ext uri="{3AFAAA56-56D3-431D-BCD4-E75A35582382}">
                       <p173:tracksInfo xmlns:p173="http://schemas.microsoft.com/office/powerpoint/2017/3/main" displayLoc="slide">
                         <p173:trackLst>
-                          <p173:track id="{7D4B433C-7FAD-45EE-9648-D7BB8C3A6966}" label="English (captions)" lang="en-US" r:embed="rId11"/>
+                          <p173:track id="{261CECC4-C03A-4A95-9D58-C5F2B96500CD}" label="English (captions)" lang="en-US" r:embed="rId11"/>
                         </p173:trackLst>
                       </p173:tracksInfo>
                     </p:ext>
@@ -9865,7 +9865,7 @@
         </p:blipFill>
         <p:spPr>
           <a:xfrm>
-            <a:off x="127000" y="6350000"/>
+            <a:off x="12446000" y="127000"/>
             <a:ext cx="304800" cy="304800"/>
           </a:xfrm>
           <a:prstGeom prst="rect">
@@ -10938,7 +10938,7 @@
             <a:hlinkClick r:id="" action="ppaction://media"/>
             <a:extLst>
               <a:ext uri="{FF2B5EF4-FFF2-40B4-BE49-F238E27FC236}">
-                <a16:creationId xmlns:a16="http://schemas.microsoft.com/office/drawing/2014/main" id="{90EF6DFC-B08A-D0E8-1F1F-E17AD5D22E9F}"/>
+                <a16:creationId xmlns:a16="http://schemas.microsoft.com/office/drawing/2014/main" id="{89EF49F3-1989-1F3B-F648-C543A2892C22}"/>
               </a:ext>
             </a:extLst>
           </p:cNvPr>
@@ -10954,7 +10954,7 @@
                     <p:ext uri="{3AFAAA56-56D3-431D-BCD4-E75A35582382}">
                       <p173:tracksInfo xmlns:p173="http://schemas.microsoft.com/office/powerpoint/2017/3/main" displayLoc="slide">
                         <p173:trackLst>
-                          <p173:track id="{2653B99C-067A-428B-834B-2EA4CA981096}" label="English (captions)" lang="en-US" r:embed="rId8"/>
+                          <p173:track id="{98B46AB6-1A3B-4416-9600-82EC8778FBB5}" label="English (captions)" lang="en-US" r:embed="rId8"/>
                         </p173:trackLst>
                       </p173:tracksInfo>
                     </p:ext>
@@ -10972,7 +10972,7 @@
         </p:blipFill>
         <p:spPr>
           <a:xfrm>
-            <a:off x="127000" y="6350000"/>
+            <a:off x="12446000" y="127000"/>
             <a:ext cx="304800" cy="304800"/>
           </a:xfrm>
           <a:prstGeom prst="rect">
@@ -12091,7 +12091,7 @@
             <a:hlinkClick r:id="" action="ppaction://media"/>
             <a:extLst>
               <a:ext uri="{FF2B5EF4-FFF2-40B4-BE49-F238E27FC236}">
-                <a16:creationId xmlns:a16="http://schemas.microsoft.com/office/drawing/2014/main" id="{8E361CC4-7FF9-F42D-4337-A15308B8850E}"/>
+                <a16:creationId xmlns:a16="http://schemas.microsoft.com/office/drawing/2014/main" id="{D6EB12A6-E312-3007-7625-4DF3C97C7384}"/>
               </a:ext>
             </a:extLst>
           </p:cNvPr>
@@ -12107,7 +12107,7 @@
                     <p:ext uri="{3AFAAA56-56D3-431D-BCD4-E75A35582382}">
                       <p173:tracksInfo xmlns:p173="http://schemas.microsoft.com/office/powerpoint/2017/3/main" displayLoc="slide">
                         <p173:trackLst>
-                          <p173:track id="{B8E7444D-C65A-4560-AFC4-D4641DFE1C59}" label="English (captions)" lang="en-US" r:embed="rId10"/>
+                          <p173:track id="{349C9BD6-7B98-4409-8FB9-9A3235F15B29}" label="English (captions)" lang="en-US" r:embed="rId10"/>
                         </p173:trackLst>
                       </p173:tracksInfo>
                     </p:ext>
@@ -12125,7 +12125,7 @@
         </p:blipFill>
         <p:spPr>
           <a:xfrm>
-            <a:off x="127000" y="6350000"/>
+            <a:off x="12446000" y="127000"/>
             <a:ext cx="304800" cy="304800"/>
           </a:xfrm>
           <a:prstGeom prst="rect">
@@ -13282,7 +13282,7 @@
             <a:hlinkClick r:id="" action="ppaction://media"/>
             <a:extLst>
               <a:ext uri="{FF2B5EF4-FFF2-40B4-BE49-F238E27FC236}">
-                <a16:creationId xmlns:a16="http://schemas.microsoft.com/office/drawing/2014/main" id="{14A89B13-5736-976B-768D-B20D36FC4F40}"/>
+                <a16:creationId xmlns:a16="http://schemas.microsoft.com/office/drawing/2014/main" id="{B0C65789-22A2-3648-B4B3-A636210535CB}"/>
               </a:ext>
             </a:extLst>
           </p:cNvPr>
@@ -13298,7 +13298,7 @@
                     <p:ext uri="{3AFAAA56-56D3-431D-BCD4-E75A35582382}">
                       <p173:tracksInfo xmlns:p173="http://schemas.microsoft.com/office/powerpoint/2017/3/main" displayLoc="slide">
                         <p173:trackLst>
-                          <p173:track id="{2E0898D2-ECDF-472A-8104-CA79A3A0C7B0}" label="English (captions)" lang="en-US" r:embed="rId8"/>
+                          <p173:track id="{C4519026-8272-4CA0-86F9-4450E91D2D47}" label="English (captions)" lang="en-US" r:embed="rId8"/>
                         </p173:trackLst>
                       </p173:tracksInfo>
                     </p:ext>
@@ -13316,7 +13316,7 @@
         </p:blipFill>
         <p:spPr>
           <a:xfrm>
-            <a:off x="127000" y="6350000"/>
+            <a:off x="12446000" y="127000"/>
             <a:ext cx="304800" cy="304800"/>
           </a:xfrm>
           <a:prstGeom prst="rect">
@@ -15107,7 +15107,7 @@
             <a:hlinkClick r:id="" action="ppaction://media"/>
             <a:extLst>
               <a:ext uri="{FF2B5EF4-FFF2-40B4-BE49-F238E27FC236}">
-                <a16:creationId xmlns:a16="http://schemas.microsoft.com/office/drawing/2014/main" id="{A24EBA24-88D7-AF27-07B5-1CFA0381D5F6}"/>
+                <a16:creationId xmlns:a16="http://schemas.microsoft.com/office/drawing/2014/main" id="{251F5CB9-E650-CE64-21B8-F1AFB28B7F93}"/>
               </a:ext>
             </a:extLst>
           </p:cNvPr>
@@ -15123,7 +15123,7 @@
                     <p:ext uri="{3AFAAA56-56D3-431D-BCD4-E75A35582382}">
                       <p173:tracksInfo xmlns:p173="http://schemas.microsoft.com/office/powerpoint/2017/3/main" displayLoc="slide">
                         <p173:trackLst>
-                          <p173:track id="{E3855430-2743-4A8C-8ABD-B9754124C1EF}" label="English (captions)" lang="en-US" r:embed="rId8"/>
+                          <p173:track id="{4AB9364C-9502-4C49-8138-813E2916F5F4}" label="English (captions)" lang="en-US" r:embed="rId8"/>
                         </p173:trackLst>
                       </p173:tracksInfo>
                     </p:ext>
@@ -15141,7 +15141,7 @@
         </p:blipFill>
         <p:spPr>
           <a:xfrm>
-            <a:off x="127000" y="6350000"/>
+            <a:off x="12446000" y="127000"/>
             <a:ext cx="304800" cy="304800"/>
           </a:xfrm>
           <a:prstGeom prst="rect">
@@ -17354,7 +17354,7 @@
             <a:hlinkClick r:id="" action="ppaction://media"/>
             <a:extLst>
               <a:ext uri="{FF2B5EF4-FFF2-40B4-BE49-F238E27FC236}">
-                <a16:creationId xmlns:a16="http://schemas.microsoft.com/office/drawing/2014/main" id="{4A19C0DC-6D69-2647-FA2F-574B4E4389AC}"/>
+                <a16:creationId xmlns:a16="http://schemas.microsoft.com/office/drawing/2014/main" id="{8FE80C9D-D8F3-694F-FF88-442885C6B2B2}"/>
               </a:ext>
             </a:extLst>
           </p:cNvPr>
@@ -17370,7 +17370,7 @@
                     <p:ext uri="{3AFAAA56-56D3-431D-BCD4-E75A35582382}">
                       <p173:tracksInfo xmlns:p173="http://schemas.microsoft.com/office/powerpoint/2017/3/main" displayLoc="slide">
                         <p173:trackLst>
-                          <p173:track id="{3C19B869-6639-4BAD-B741-15BA2CCB7E1C}" label="English (captions)" lang="en-US" r:embed="rId8"/>
+                          <p173:track id="{DC9D9B71-D832-49E8-AA73-407C11BB685F}" label="English (captions)" lang="en-US" r:embed="rId8"/>
                         </p173:trackLst>
                       </p173:tracksInfo>
                     </p:ext>
@@ -17388,7 +17388,7 @@
         </p:blipFill>
         <p:spPr>
           <a:xfrm>
-            <a:off x="127000" y="6350000"/>
+            <a:off x="12446000" y="127000"/>
             <a:ext cx="304800" cy="304800"/>
           </a:xfrm>
           <a:prstGeom prst="rect">
@@ -19379,7 +19379,7 @@
             <a:hlinkClick r:id="" action="ppaction://media"/>
             <a:extLst>
               <a:ext uri="{FF2B5EF4-FFF2-40B4-BE49-F238E27FC236}">
-                <a16:creationId xmlns:a16="http://schemas.microsoft.com/office/drawing/2014/main" id="{4BE57C50-8D02-06CB-5AF1-16CF20CA5FB8}"/>
+                <a16:creationId xmlns:a16="http://schemas.microsoft.com/office/drawing/2014/main" id="{3D262588-CCB5-66F4-DE1F-4734396E0A0F}"/>
               </a:ext>
             </a:extLst>
           </p:cNvPr>
@@ -19395,7 +19395,7 @@
                     <p:ext uri="{3AFAAA56-56D3-431D-BCD4-E75A35582382}">
                       <p173:tracksInfo xmlns:p173="http://schemas.microsoft.com/office/powerpoint/2017/3/main" displayLoc="slide">
                         <p173:trackLst>
-                          <p173:track id="{477C1C55-13BE-4E0C-B9F5-E4668D5EB480}" label="English (captions)" lang="en-US" r:embed="rId8"/>
+                          <p173:track id="{AE9206F8-70FE-41FA-9CDE-3AEE7EE0AC5C}" label="English (captions)" lang="en-US" r:embed="rId8"/>
                         </p173:trackLst>
                       </p173:tracksInfo>
                     </p:ext>
@@ -19413,7 +19413,7 @@
         </p:blipFill>
         <p:spPr>
           <a:xfrm>
-            <a:off x="127000" y="6350000"/>
+            <a:off x="12446000" y="127000"/>
             <a:ext cx="304800" cy="304800"/>
           </a:xfrm>
           <a:prstGeom prst="rect">
@@ -20514,7 +20514,7 @@
             <a:hlinkClick r:id="" action="ppaction://media"/>
             <a:extLst>
               <a:ext uri="{FF2B5EF4-FFF2-40B4-BE49-F238E27FC236}">
-                <a16:creationId xmlns:a16="http://schemas.microsoft.com/office/drawing/2014/main" id="{AD699A54-DEC6-963F-FF80-6E45720EDD5E}"/>
+                <a16:creationId xmlns:a16="http://schemas.microsoft.com/office/drawing/2014/main" id="{29BF5324-EE45-28AC-FFD2-9FEAAD6B5CCD}"/>
               </a:ext>
             </a:extLst>
           </p:cNvPr>
@@ -20530,7 +20530,7 @@
                     <p:ext uri="{3AFAAA56-56D3-431D-BCD4-E75A35582382}">
                       <p173:tracksInfo xmlns:p173="http://schemas.microsoft.com/office/powerpoint/2017/3/main" displayLoc="slide">
                         <p173:trackLst>
-                          <p173:track id="{EA8E482F-DAD1-4EA7-A1B2-76D0FEDD96CD}" label="English (captions)" lang="en-US" r:embed="rId10"/>
+                          <p173:track id="{4E882946-7CEF-4AA4-9537-C1118D2EBBD1}" label="English (captions)" lang="en-US" r:embed="rId10"/>
                         </p173:trackLst>
                       </p173:tracksInfo>
                     </p:ext>
@@ -20548,7 +20548,7 @@
         </p:blipFill>
         <p:spPr>
           <a:xfrm>
-            <a:off x="127000" y="6350000"/>
+            <a:off x="12446000" y="127000"/>
             <a:ext cx="304800" cy="304800"/>
           </a:xfrm>
           <a:prstGeom prst="rect">
@@ -21936,7 +21936,7 @@
             <a:hlinkClick r:id="" action="ppaction://media"/>
             <a:extLst>
               <a:ext uri="{FF2B5EF4-FFF2-40B4-BE49-F238E27FC236}">
-                <a16:creationId xmlns:a16="http://schemas.microsoft.com/office/drawing/2014/main" id="{A9CCA745-3807-F4A0-469B-D5665CB874B9}"/>
+                <a16:creationId xmlns:a16="http://schemas.microsoft.com/office/drawing/2014/main" id="{8BB81163-7B72-05C3-8B5A-386B38E8DA2F}"/>
               </a:ext>
             </a:extLst>
           </p:cNvPr>
@@ -21952,7 +21952,7 @@
                     <p:ext uri="{3AFAAA56-56D3-431D-BCD4-E75A35582382}">
                       <p173:tracksInfo xmlns:p173="http://schemas.microsoft.com/office/powerpoint/2017/3/main" displayLoc="slide">
                         <p173:trackLst>
-                          <p173:track id="{45A55E3C-E912-41BB-8999-27C88AE0165D}" label="English (captions)" lang="en-US" r:embed="rId9"/>
+                          <p173:track id="{AB639DF0-6073-4986-AA04-9A484B5DEBA7}" label="English (captions)" lang="en-US" r:embed="rId9"/>
                         </p173:trackLst>
                       </p173:tracksInfo>
                     </p:ext>
@@ -21970,7 +21970,7 @@
         </p:blipFill>
         <p:spPr>
           <a:xfrm>
-            <a:off x="127000" y="6350000"/>
+            <a:off x="12446000" y="127000"/>
             <a:ext cx="304800" cy="304800"/>
           </a:xfrm>
           <a:prstGeom prst="rect">
